--- a/finops-agent/artifacts/finops_summary.pptx
+++ b/finops-agent/artifacts/finops_summary.pptx
@@ -3128,12 +3128,12 @@
           <a:lstStyle/>
           <a:p>
             <a:r>
-              <a:t>Generated 2026-06-09T20:57:11.670097+00:00</a:t>
-            </a:r>
-          </a:p>
-          <a:p>
-            <a:r>
-              <a:t>Period 2026-05-01T20:55:34.382956+00:00 to 2026-06-09</a:t>
+              <a:t>Generated 2026-06-09T21:33:28.034345+00:00</a:t>
+            </a:r>
+          </a:p>
+          <a:p>
+            <a:r>
+              <a:t>Period 2026-05-01T21:31:51.247762+00:00 to 2026-06-09</a:t>
             </a:r>
           </a:p>
         </p:txBody>
@@ -3254,7 +3254,7 @@
           <a:lstStyle/>
           <a:p>
             <a:r>
-              <a:t>cf48fc77-a40d-2629-7403-04039ba4cd86 (High) | Unknown resource | Resv1Y 2054.0 | SP1Y 2054.0</a:t>
+              <a:t>74e8511d-561b-1b28-a4e1-7a69b745a145 (High) | Unknown resource | Resv1Y 281.0 | SP1Y 281.0</a:t>
             </a:r>
           </a:p>
         </p:txBody>
@@ -3308,7 +3308,7 @@
         </p:nvGraphicFramePr>
         <p:xfrm>
           <a:off x="274320" y="1097280"/>
-          <a:ext cx="11612880" cy="5303520"/>
+          <a:ext cx="9418320" cy="5303520"/>
         </p:xfrm>
         <a:graphic>
           <a:graphicData uri="http://schemas.openxmlformats.org/drawingml/2006/table">
@@ -3317,1091 +3317,1561 @@
                 <a:tableStyleId>{5C22544A-7EE6-4342-B048-85BDC9FD1C3A}</a:tableStyleId>
               </a:tblPr>
               <a:tblGrid>
-                <a:gridCol w="1451610"/>
-                <a:gridCol w="1451610"/>
-                <a:gridCol w="1451610"/>
-                <a:gridCol w="1451610"/>
-                <a:gridCol w="1451610"/>
-                <a:gridCol w="1451610"/>
-                <a:gridCol w="1451610"/>
-                <a:gridCol w="1451610"/>
+                <a:gridCol w="2468880"/>
+                <a:gridCol w="1463040"/>
+                <a:gridCol w="1645920"/>
+                <a:gridCol w="640080"/>
+                <a:gridCol w="640080"/>
+                <a:gridCol w="640080"/>
+                <a:gridCol w="640080"/>
+                <a:gridCol w="640080"/>
+                <a:gridCol w="640080"/>
               </a:tblGrid>
-              <a:tr h="482138">
-                <a:tc>
-                  <a:txBody>
-                    <a:bodyPr/>
-                    <a:lstStyle/>
-                    <a:p>
-                      <a:r>
+              <a:tr h="407963">
+                <a:tc>
+                  <a:txBody>
+                    <a:bodyPr wrap="none"/>
+                    <a:lstStyle/>
+                    <a:p>
+                      <a:r>
+                        <a:rPr sz="700"/>
+                        <a:t>Resource ID</a:t>
+                      </a:r>
+                    </a:p>
+                  </a:txBody>
+                  <a:tcPr marL="27432" marR="27432" marT="18288" marB="18288"/>
+                </a:tc>
+                <a:tc>
+                  <a:txBody>
+                    <a:bodyPr wrap="none"/>
+                    <a:lstStyle/>
+                    <a:p>
+                      <a:r>
+                        <a:rPr sz="700"/>
+                        <a:t>Resource Name</a:t>
+                      </a:r>
+                    </a:p>
+                  </a:txBody>
+                  <a:tcPr marL="27432" marR="27432" marT="18288" marB="18288"/>
+                </a:tc>
+                <a:tc>
+                  <a:txBody>
+                    <a:bodyPr wrap="none"/>
+                    <a:lstStyle/>
+                    <a:p>
+                      <a:r>
+                        <a:rPr sz="700"/>
                         <a:t>Recommendation</a:t>
                       </a:r>
                     </a:p>
                   </a:txBody>
-                  <a:tcPr/>
-                </a:tc>
-                <a:tc>
-                  <a:txBody>
-                    <a:bodyPr/>
-                    <a:lstStyle/>
-                    <a:p>
-                      <a:r>
-                        <a:t>Resource</a:t>
-                      </a:r>
-                    </a:p>
-                  </a:txBody>
-                  <a:tcPr/>
-                </a:tc>
-                <a:tc>
-                  <a:txBody>
-                    <a:bodyPr/>
-                    <a:lstStyle/>
-                    <a:p>
-                      <a:r>
+                  <a:tcPr marL="27432" marR="27432" marT="18288" marB="18288"/>
+                </a:tc>
+                <a:tc>
+                  <a:txBody>
+                    <a:bodyPr wrap="none"/>
+                    <a:lstStyle/>
+                    <a:p>
+                      <a:r>
+                        <a:rPr sz="700"/>
                         <a:t>Resv1Y</a:t>
                       </a:r>
                     </a:p>
                   </a:txBody>
-                  <a:tcPr/>
-                </a:tc>
-                <a:tc>
-                  <a:txBody>
-                    <a:bodyPr/>
-                    <a:lstStyle/>
-                    <a:p>
-                      <a:r>
+                  <a:tcPr marL="27432" marR="27432" marT="18288" marB="18288"/>
+                </a:tc>
+                <a:tc>
+                  <a:txBody>
+                    <a:bodyPr wrap="none"/>
+                    <a:lstStyle/>
+                    <a:p>
+                      <a:r>
+                        <a:rPr sz="700"/>
                         <a:t>Resv2Y</a:t>
                       </a:r>
                     </a:p>
                   </a:txBody>
-                  <a:tcPr/>
-                </a:tc>
-                <a:tc>
-                  <a:txBody>
-                    <a:bodyPr/>
-                    <a:lstStyle/>
-                    <a:p>
-                      <a:r>
+                  <a:tcPr marL="27432" marR="27432" marT="18288" marB="18288"/>
+                </a:tc>
+                <a:tc>
+                  <a:txBody>
+                    <a:bodyPr wrap="none"/>
+                    <a:lstStyle/>
+                    <a:p>
+                      <a:r>
+                        <a:rPr sz="700"/>
                         <a:t>Resv3Y</a:t>
                       </a:r>
                     </a:p>
                   </a:txBody>
-                  <a:tcPr/>
-                </a:tc>
-                <a:tc>
-                  <a:txBody>
-                    <a:bodyPr/>
-                    <a:lstStyle/>
-                    <a:p>
-                      <a:r>
+                  <a:tcPr marL="27432" marR="27432" marT="18288" marB="18288"/>
+                </a:tc>
+                <a:tc>
+                  <a:txBody>
+                    <a:bodyPr wrap="none"/>
+                    <a:lstStyle/>
+                    <a:p>
+                      <a:r>
+                        <a:rPr sz="700"/>
                         <a:t>SP1Y</a:t>
                       </a:r>
                     </a:p>
                   </a:txBody>
-                  <a:tcPr/>
-                </a:tc>
-                <a:tc>
-                  <a:txBody>
-                    <a:bodyPr/>
-                    <a:lstStyle/>
-                    <a:p>
-                      <a:r>
+                  <a:tcPr marL="27432" marR="27432" marT="18288" marB="18288"/>
+                </a:tc>
+                <a:tc>
+                  <a:txBody>
+                    <a:bodyPr wrap="none"/>
+                    <a:lstStyle/>
+                    <a:p>
+                      <a:r>
+                        <a:rPr sz="700"/>
                         <a:t>SP2Y</a:t>
                       </a:r>
                     </a:p>
                   </a:txBody>
-                  <a:tcPr/>
-                </a:tc>
-                <a:tc>
-                  <a:txBody>
-                    <a:bodyPr/>
-                    <a:lstStyle/>
-                    <a:p>
-                      <a:r>
+                  <a:tcPr marL="27432" marR="27432" marT="18288" marB="18288"/>
+                </a:tc>
+                <a:tc>
+                  <a:txBody>
+                    <a:bodyPr wrap="none"/>
+                    <a:lstStyle/>
+                    <a:p>
+                      <a:r>
+                        <a:rPr sz="700"/>
                         <a:t>SP3Y</a:t>
                       </a:r>
                     </a:p>
                   </a:txBody>
-                  <a:tcPr/>
+                  <a:tcPr marL="27432" marR="27432" marT="18288" marB="18288"/>
                 </a:tc>
               </a:tr>
-              <a:tr h="482138">
-                <a:tc>
-                  <a:txBody>
-                    <a:bodyPr/>
-                    <a:lstStyle/>
-                    <a:p>
-                      <a:r>
-                        <a:t>ff9b060e-5519-13ae-c3b4-489b2cf28f5c</a:t>
-                      </a:r>
-                    </a:p>
-                  </a:txBody>
-                  <a:tcPr/>
-                </a:tc>
-                <a:tc>
-                  <a:txBody>
-                    <a:bodyPr/>
-                    <a:lstStyle/>
-                    <a:p>
-                      <a:r>
+              <a:tr h="407963">
+                <a:tc>
+                  <a:txBody>
+                    <a:bodyPr wrap="none"/>
+                    <a:lstStyle/>
+                    <a:p>
+                      <a:r>
+                        <a:rPr sz="600"/>
+                        <a:t>/subscriptions/5755893a-8056-4ba8-9916-1133c80a80f3/resourceGroups/wolffentplogsrg/providers/Microsoft.EventHub/namespaces/ADX-EG-wolffentplogcluster</a:t>
+                      </a:r>
+                    </a:p>
+                  </a:txBody>
+                  <a:tcPr marL="27432" marR="27432" marT="18288" marB="18288"/>
+                </a:tc>
+                <a:tc>
+                  <a:txBody>
+                    <a:bodyPr wrap="none"/>
+                    <a:lstStyle/>
+                    <a:p>
+                      <a:r>
+                        <a:rPr sz="600"/>
+                        <a:t>ADX-EG-wolffentplogcluster</a:t>
+                      </a:r>
+                    </a:p>
+                  </a:txBody>
+                  <a:tcPr marL="27432" marR="27432" marT="18288" marB="18288"/>
+                </a:tc>
+                <a:tc>
+                  <a:txBody>
+                    <a:bodyPr wrap="none"/>
+                    <a:lstStyle/>
+                    <a:p>
+                      <a:r>
+                        <a:rPr sz="600"/>
+                        <a:t>6082056b-fc7a-e6ab-eb07-0bb4ff7fd7b8</a:t>
+                      </a:r>
+                    </a:p>
+                  </a:txBody>
+                  <a:tcPr marL="27432" marR="27432" marT="18288" marB="18288"/>
+                </a:tc>
+                <a:tc>
+                  <a:txBody>
+                    <a:bodyPr wrap="none"/>
+                    <a:lstStyle/>
+                    <a:p>
+                      <a:r>
+                        <a:rPr sz="600"/>
+                        <a:t>None</a:t>
+                      </a:r>
+                    </a:p>
+                  </a:txBody>
+                  <a:tcPr marL="27432" marR="27432" marT="18288" marB="18288"/>
+                </a:tc>
+                <a:tc>
+                  <a:txBody>
+                    <a:bodyPr wrap="none"/>
+                    <a:lstStyle/>
+                    <a:p>
+                      <a:r>
+                        <a:rPr sz="600"/>
+                        <a:t>None</a:t>
+                      </a:r>
+                    </a:p>
+                  </a:txBody>
+                  <a:tcPr marL="27432" marR="27432" marT="18288" marB="18288"/>
+                </a:tc>
+                <a:tc>
+                  <a:txBody>
+                    <a:bodyPr wrap="none"/>
+                    <a:lstStyle/>
+                    <a:p>
+                      <a:r>
+                        <a:rPr sz="600"/>
+                        <a:t>None</a:t>
+                      </a:r>
+                    </a:p>
+                  </a:txBody>
+                  <a:tcPr marL="27432" marR="27432" marT="18288" marB="18288"/>
+                </a:tc>
+                <a:tc>
+                  <a:txBody>
+                    <a:bodyPr wrap="none"/>
+                    <a:lstStyle/>
+                    <a:p>
+                      <a:r>
+                        <a:rPr sz="600"/>
+                        <a:t>None</a:t>
+                      </a:r>
+                    </a:p>
+                  </a:txBody>
+                  <a:tcPr marL="27432" marR="27432" marT="18288" marB="18288"/>
+                </a:tc>
+                <a:tc>
+                  <a:txBody>
+                    <a:bodyPr wrap="none"/>
+                    <a:lstStyle/>
+                    <a:p>
+                      <a:r>
+                        <a:rPr sz="600"/>
+                        <a:t>None</a:t>
+                      </a:r>
+                    </a:p>
+                  </a:txBody>
+                  <a:tcPr marL="27432" marR="27432" marT="18288" marB="18288"/>
+                </a:tc>
+                <a:tc>
+                  <a:txBody>
+                    <a:bodyPr wrap="none"/>
+                    <a:lstStyle/>
+                    <a:p>
+                      <a:r>
+                        <a:rPr sz="600"/>
+                        <a:t>None</a:t>
+                      </a:r>
+                    </a:p>
+                  </a:txBody>
+                  <a:tcPr marL="27432" marR="27432" marT="18288" marB="18288"/>
+                </a:tc>
+              </a:tr>
+              <a:tr h="407963">
+                <a:tc>
+                  <a:txBody>
+                    <a:bodyPr wrap="none"/>
+                    <a:lstStyle/>
+                    <a:p>
+                      <a:r>
+                        <a:rPr sz="600"/>
+                        <a:t>/subscriptions/5755893a-8056-4ba8-9916-1133c80a80f3</a:t>
+                      </a:r>
+                    </a:p>
+                  </a:txBody>
+                  <a:tcPr marL="27432" marR="27432" marT="18288" marB="18288"/>
+                </a:tc>
+                <a:tc>
+                  <a:txBody>
+                    <a:bodyPr wrap="none"/>
+                    <a:lstStyle/>
+                    <a:p>
+                      <a:r>
+                        <a:rPr sz="600"/>
                         <a:t>Unknown resource</a:t>
                       </a:r>
                     </a:p>
                   </a:txBody>
-                  <a:tcPr/>
-                </a:tc>
-                <a:tc>
-                  <a:txBody>
-                    <a:bodyPr/>
-                    <a:lstStyle/>
-                    <a:p>
-                      <a:r>
+                  <a:tcPr marL="27432" marR="27432" marT="18288" marB="18288"/>
+                </a:tc>
+                <a:tc>
+                  <a:txBody>
+                    <a:bodyPr wrap="none"/>
+                    <a:lstStyle/>
+                    <a:p>
+                      <a:r>
+                        <a:rPr sz="600"/>
+                        <a:t>a2483a37-1437-4bd2-f4c3-b8e8bb7cedcd</a:t>
+                      </a:r>
+                    </a:p>
+                  </a:txBody>
+                  <a:tcPr marL="27432" marR="27432" marT="18288" marB="18288"/>
+                </a:tc>
+                <a:tc>
+                  <a:txBody>
+                    <a:bodyPr wrap="none"/>
+                    <a:lstStyle/>
+                    <a:p>
+                      <a:r>
+                        <a:rPr sz="600"/>
+                        <a:t>422.0</a:t>
+                      </a:r>
+                    </a:p>
+                  </a:txBody>
+                  <a:tcPr marL="27432" marR="27432" marT="18288" marB="18288"/>
+                </a:tc>
+                <a:tc>
+                  <a:txBody>
+                    <a:bodyPr wrap="none"/>
+                    <a:lstStyle/>
+                    <a:p>
+                      <a:r>
+                        <a:rPr sz="600"/>
+                        <a:t>844.0</a:t>
+                      </a:r>
+                    </a:p>
+                  </a:txBody>
+                  <a:tcPr marL="27432" marR="27432" marT="18288" marB="18288"/>
+                </a:tc>
+                <a:tc>
+                  <a:txBody>
+                    <a:bodyPr wrap="none"/>
+                    <a:lstStyle/>
+                    <a:p>
+                      <a:r>
+                        <a:rPr sz="600"/>
+                        <a:t>1266.0</a:t>
+                      </a:r>
+                    </a:p>
+                  </a:txBody>
+                  <a:tcPr marL="27432" marR="27432" marT="18288" marB="18288"/>
+                </a:tc>
+                <a:tc>
+                  <a:txBody>
+                    <a:bodyPr wrap="none"/>
+                    <a:lstStyle/>
+                    <a:p>
+                      <a:r>
+                        <a:rPr sz="600"/>
+                        <a:t>422.0</a:t>
+                      </a:r>
+                    </a:p>
+                  </a:txBody>
+                  <a:tcPr marL="27432" marR="27432" marT="18288" marB="18288"/>
+                </a:tc>
+                <a:tc>
+                  <a:txBody>
+                    <a:bodyPr wrap="none"/>
+                    <a:lstStyle/>
+                    <a:p>
+                      <a:r>
+                        <a:rPr sz="600"/>
+                        <a:t>844.0</a:t>
+                      </a:r>
+                    </a:p>
+                  </a:txBody>
+                  <a:tcPr marL="27432" marR="27432" marT="18288" marB="18288"/>
+                </a:tc>
+                <a:tc>
+                  <a:txBody>
+                    <a:bodyPr wrap="none"/>
+                    <a:lstStyle/>
+                    <a:p>
+                      <a:r>
+                        <a:rPr sz="600"/>
+                        <a:t>1266.0</a:t>
+                      </a:r>
+                    </a:p>
+                  </a:txBody>
+                  <a:tcPr marL="27432" marR="27432" marT="18288" marB="18288"/>
+                </a:tc>
+              </a:tr>
+              <a:tr h="407963">
+                <a:tc>
+                  <a:txBody>
+                    <a:bodyPr wrap="none"/>
+                    <a:lstStyle/>
+                    <a:p>
+                      <a:r>
+                        <a:rPr sz="600"/>
+                        <a:t>/subscriptions/5755893a-8056-4ba8-9916-1133c80a80f3</a:t>
+                      </a:r>
+                    </a:p>
+                  </a:txBody>
+                  <a:tcPr marL="27432" marR="27432" marT="18288" marB="18288"/>
+                </a:tc>
+                <a:tc>
+                  <a:txBody>
+                    <a:bodyPr wrap="none"/>
+                    <a:lstStyle/>
+                    <a:p>
+                      <a:r>
+                        <a:rPr sz="600"/>
+                        <a:t>Unknown resource</a:t>
+                      </a:r>
+                    </a:p>
+                  </a:txBody>
+                  <a:tcPr marL="27432" marR="27432" marT="18288" marB="18288"/>
+                </a:tc>
+                <a:tc>
+                  <a:txBody>
+                    <a:bodyPr wrap="none"/>
+                    <a:lstStyle/>
+                    <a:p>
+                      <a:r>
+                        <a:rPr sz="600"/>
+                        <a:t>4cdaea8d-95c3-3e3a-39b9-6e72980e0cf3</a:t>
+                      </a:r>
+                    </a:p>
+                  </a:txBody>
+                  <a:tcPr marL="27432" marR="27432" marT="18288" marB="18288"/>
+                </a:tc>
+                <a:tc>
+                  <a:txBody>
+                    <a:bodyPr wrap="none"/>
+                    <a:lstStyle/>
+                    <a:p>
+                      <a:r>
+                        <a:rPr sz="600"/>
+                        <a:t>422.0</a:t>
+                      </a:r>
+                    </a:p>
+                  </a:txBody>
+                  <a:tcPr marL="27432" marR="27432" marT="18288" marB="18288"/>
+                </a:tc>
+                <a:tc>
+                  <a:txBody>
+                    <a:bodyPr wrap="none"/>
+                    <a:lstStyle/>
+                    <a:p>
+                      <a:r>
+                        <a:rPr sz="600"/>
+                        <a:t>844.0</a:t>
+                      </a:r>
+                    </a:p>
+                  </a:txBody>
+                  <a:tcPr marL="27432" marR="27432" marT="18288" marB="18288"/>
+                </a:tc>
+                <a:tc>
+                  <a:txBody>
+                    <a:bodyPr wrap="none"/>
+                    <a:lstStyle/>
+                    <a:p>
+                      <a:r>
+                        <a:rPr sz="600"/>
+                        <a:t>1266.0</a:t>
+                      </a:r>
+                    </a:p>
+                  </a:txBody>
+                  <a:tcPr marL="27432" marR="27432" marT="18288" marB="18288"/>
+                </a:tc>
+                <a:tc>
+                  <a:txBody>
+                    <a:bodyPr wrap="none"/>
+                    <a:lstStyle/>
+                    <a:p>
+                      <a:r>
+                        <a:rPr sz="600"/>
+                        <a:t>422.0</a:t>
+                      </a:r>
+                    </a:p>
+                  </a:txBody>
+                  <a:tcPr marL="27432" marR="27432" marT="18288" marB="18288"/>
+                </a:tc>
+                <a:tc>
+                  <a:txBody>
+                    <a:bodyPr wrap="none"/>
+                    <a:lstStyle/>
+                    <a:p>
+                      <a:r>
+                        <a:rPr sz="600"/>
+                        <a:t>844.0</a:t>
+                      </a:r>
+                    </a:p>
+                  </a:txBody>
+                  <a:tcPr marL="27432" marR="27432" marT="18288" marB="18288"/>
+                </a:tc>
+                <a:tc>
+                  <a:txBody>
+                    <a:bodyPr wrap="none"/>
+                    <a:lstStyle/>
+                    <a:p>
+                      <a:r>
+                        <a:rPr sz="600"/>
+                        <a:t>1266.0</a:t>
+                      </a:r>
+                    </a:p>
+                  </a:txBody>
+                  <a:tcPr marL="27432" marR="27432" marT="18288" marB="18288"/>
+                </a:tc>
+              </a:tr>
+              <a:tr h="407963">
+                <a:tc>
+                  <a:txBody>
+                    <a:bodyPr wrap="none"/>
+                    <a:lstStyle/>
+                    <a:p>
+                      <a:r>
+                        <a:rPr sz="600"/>
+                        <a:t>/subscriptions/5755893a-8056-4ba8-9916-1133c80a80f3</a:t>
+                      </a:r>
+                    </a:p>
+                  </a:txBody>
+                  <a:tcPr marL="27432" marR="27432" marT="18288" marB="18288"/>
+                </a:tc>
+                <a:tc>
+                  <a:txBody>
+                    <a:bodyPr wrap="none"/>
+                    <a:lstStyle/>
+                    <a:p>
+                      <a:r>
+                        <a:rPr sz="600"/>
+                        <a:t>Unknown resource</a:t>
+                      </a:r>
+                    </a:p>
+                  </a:txBody>
+                  <a:tcPr marL="27432" marR="27432" marT="18288" marB="18288"/>
+                </a:tc>
+                <a:tc>
+                  <a:txBody>
+                    <a:bodyPr wrap="none"/>
+                    <a:lstStyle/>
+                    <a:p>
+                      <a:r>
+                        <a:rPr sz="600"/>
+                        <a:t>42f43fd4-0f89-3a08-b21c-b499cb465d90</a:t>
+                      </a:r>
+                    </a:p>
+                  </a:txBody>
+                  <a:tcPr marL="27432" marR="27432" marT="18288" marB="18288"/>
+                </a:tc>
+                <a:tc>
+                  <a:txBody>
+                    <a:bodyPr wrap="none"/>
+                    <a:lstStyle/>
+                    <a:p>
+                      <a:r>
+                        <a:rPr sz="600"/>
+                        <a:t>422.0</a:t>
+                      </a:r>
+                    </a:p>
+                  </a:txBody>
+                  <a:tcPr marL="27432" marR="27432" marT="18288" marB="18288"/>
+                </a:tc>
+                <a:tc>
+                  <a:txBody>
+                    <a:bodyPr wrap="none"/>
+                    <a:lstStyle/>
+                    <a:p>
+                      <a:r>
+                        <a:rPr sz="600"/>
+                        <a:t>844.0</a:t>
+                      </a:r>
+                    </a:p>
+                  </a:txBody>
+                  <a:tcPr marL="27432" marR="27432" marT="18288" marB="18288"/>
+                </a:tc>
+                <a:tc>
+                  <a:txBody>
+                    <a:bodyPr wrap="none"/>
+                    <a:lstStyle/>
+                    <a:p>
+                      <a:r>
+                        <a:rPr sz="600"/>
+                        <a:t>1266.0</a:t>
+                      </a:r>
+                    </a:p>
+                  </a:txBody>
+                  <a:tcPr marL="27432" marR="27432" marT="18288" marB="18288"/>
+                </a:tc>
+                <a:tc>
+                  <a:txBody>
+                    <a:bodyPr wrap="none"/>
+                    <a:lstStyle/>
+                    <a:p>
+                      <a:r>
+                        <a:rPr sz="600"/>
+                        <a:t>422.0</a:t>
+                      </a:r>
+                    </a:p>
+                  </a:txBody>
+                  <a:tcPr marL="27432" marR="27432" marT="18288" marB="18288"/>
+                </a:tc>
+                <a:tc>
+                  <a:txBody>
+                    <a:bodyPr wrap="none"/>
+                    <a:lstStyle/>
+                    <a:p>
+                      <a:r>
+                        <a:rPr sz="600"/>
+                        <a:t>844.0</a:t>
+                      </a:r>
+                    </a:p>
+                  </a:txBody>
+                  <a:tcPr marL="27432" marR="27432" marT="18288" marB="18288"/>
+                </a:tc>
+                <a:tc>
+                  <a:txBody>
+                    <a:bodyPr wrap="none"/>
+                    <a:lstStyle/>
+                    <a:p>
+                      <a:r>
+                        <a:rPr sz="600"/>
+                        <a:t>1266.0</a:t>
+                      </a:r>
+                    </a:p>
+                  </a:txBody>
+                  <a:tcPr marL="27432" marR="27432" marT="18288" marB="18288"/>
+                </a:tc>
+              </a:tr>
+              <a:tr h="407963">
+                <a:tc>
+                  <a:txBody>
+                    <a:bodyPr wrap="none"/>
+                    <a:lstStyle/>
+                    <a:p>
+                      <a:r>
+                        <a:rPr sz="600"/>
+                        <a:t>/subscriptions/5755893a-8056-4ba8-9916-1133c80a80f3</a:t>
+                      </a:r>
+                    </a:p>
+                  </a:txBody>
+                  <a:tcPr marL="27432" marR="27432" marT="18288" marB="18288"/>
+                </a:tc>
+                <a:tc>
+                  <a:txBody>
+                    <a:bodyPr wrap="none"/>
+                    <a:lstStyle/>
+                    <a:p>
+                      <a:r>
+                        <a:rPr sz="600"/>
+                        <a:t>Unknown resource</a:t>
+                      </a:r>
+                    </a:p>
+                  </a:txBody>
+                  <a:tcPr marL="27432" marR="27432" marT="18288" marB="18288"/>
+                </a:tc>
+                <a:tc>
+                  <a:txBody>
+                    <a:bodyPr wrap="none"/>
+                    <a:lstStyle/>
+                    <a:p>
+                      <a:r>
+                        <a:rPr sz="600"/>
+                        <a:t>ea827a99-5b15-9d15-332a-aa74044bbefc</a:t>
+                      </a:r>
+                    </a:p>
+                  </a:txBody>
+                  <a:tcPr marL="27432" marR="27432" marT="18288" marB="18288"/>
+                </a:tc>
+                <a:tc>
+                  <a:txBody>
+                    <a:bodyPr wrap="none"/>
+                    <a:lstStyle/>
+                    <a:p>
+                      <a:r>
+                        <a:rPr sz="600"/>
+                        <a:t>281.0</a:t>
+                      </a:r>
+                    </a:p>
+                  </a:txBody>
+                  <a:tcPr marL="27432" marR="27432" marT="18288" marB="18288"/>
+                </a:tc>
+                <a:tc>
+                  <a:txBody>
+                    <a:bodyPr wrap="none"/>
+                    <a:lstStyle/>
+                    <a:p>
+                      <a:r>
+                        <a:rPr sz="600"/>
+                        <a:t>562.0</a:t>
+                      </a:r>
+                    </a:p>
+                  </a:txBody>
+                  <a:tcPr marL="27432" marR="27432" marT="18288" marB="18288"/>
+                </a:tc>
+                <a:tc>
+                  <a:txBody>
+                    <a:bodyPr wrap="none"/>
+                    <a:lstStyle/>
+                    <a:p>
+                      <a:r>
+                        <a:rPr sz="600"/>
+                        <a:t>843.0</a:t>
+                      </a:r>
+                    </a:p>
+                  </a:txBody>
+                  <a:tcPr marL="27432" marR="27432" marT="18288" marB="18288"/>
+                </a:tc>
+                <a:tc>
+                  <a:txBody>
+                    <a:bodyPr wrap="none"/>
+                    <a:lstStyle/>
+                    <a:p>
+                      <a:r>
+                        <a:rPr sz="600"/>
+                        <a:t>281.0</a:t>
+                      </a:r>
+                    </a:p>
+                  </a:txBody>
+                  <a:tcPr marL="27432" marR="27432" marT="18288" marB="18288"/>
+                </a:tc>
+                <a:tc>
+                  <a:txBody>
+                    <a:bodyPr wrap="none"/>
+                    <a:lstStyle/>
+                    <a:p>
+                      <a:r>
+                        <a:rPr sz="600"/>
+                        <a:t>562.0</a:t>
+                      </a:r>
+                    </a:p>
+                  </a:txBody>
+                  <a:tcPr marL="27432" marR="27432" marT="18288" marB="18288"/>
+                </a:tc>
+                <a:tc>
+                  <a:txBody>
+                    <a:bodyPr wrap="none"/>
+                    <a:lstStyle/>
+                    <a:p>
+                      <a:r>
+                        <a:rPr sz="600"/>
+                        <a:t>843.0</a:t>
+                      </a:r>
+                    </a:p>
+                  </a:txBody>
+                  <a:tcPr marL="27432" marR="27432" marT="18288" marB="18288"/>
+                </a:tc>
+              </a:tr>
+              <a:tr h="407963">
+                <a:tc>
+                  <a:txBody>
+                    <a:bodyPr wrap="none"/>
+                    <a:lstStyle/>
+                    <a:p>
+                      <a:r>
+                        <a:rPr sz="600"/>
+                        <a:t>/subscriptions/5755893a-8056-4ba8-9916-1133c80a80f3</a:t>
+                      </a:r>
+                    </a:p>
+                  </a:txBody>
+                  <a:tcPr marL="27432" marR="27432" marT="18288" marB="18288"/>
+                </a:tc>
+                <a:tc>
+                  <a:txBody>
+                    <a:bodyPr wrap="none"/>
+                    <a:lstStyle/>
+                    <a:p>
+                      <a:r>
+                        <a:rPr sz="600"/>
+                        <a:t>Unknown resource</a:t>
+                      </a:r>
+                    </a:p>
+                  </a:txBody>
+                  <a:tcPr marL="27432" marR="27432" marT="18288" marB="18288"/>
+                </a:tc>
+                <a:tc>
+                  <a:txBody>
+                    <a:bodyPr wrap="none"/>
+                    <a:lstStyle/>
+                    <a:p>
+                      <a:r>
+                        <a:rPr sz="600"/>
+                        <a:t>74e8511d-561b-1b28-a4e1-7a69b745a145</a:t>
+                      </a:r>
+                    </a:p>
+                  </a:txBody>
+                  <a:tcPr marL="27432" marR="27432" marT="18288" marB="18288"/>
+                </a:tc>
+                <a:tc>
+                  <a:txBody>
+                    <a:bodyPr wrap="none"/>
+                    <a:lstStyle/>
+                    <a:p>
+                      <a:r>
+                        <a:rPr sz="600"/>
+                        <a:t>281.0</a:t>
+                      </a:r>
+                    </a:p>
+                  </a:txBody>
+                  <a:tcPr marL="27432" marR="27432" marT="18288" marB="18288"/>
+                </a:tc>
+                <a:tc>
+                  <a:txBody>
+                    <a:bodyPr wrap="none"/>
+                    <a:lstStyle/>
+                    <a:p>
+                      <a:r>
+                        <a:rPr sz="600"/>
+                        <a:t>562.0</a:t>
+                      </a:r>
+                    </a:p>
+                  </a:txBody>
+                  <a:tcPr marL="27432" marR="27432" marT="18288" marB="18288"/>
+                </a:tc>
+                <a:tc>
+                  <a:txBody>
+                    <a:bodyPr wrap="none"/>
+                    <a:lstStyle/>
+                    <a:p>
+                      <a:r>
+                        <a:rPr sz="600"/>
+                        <a:t>843.0</a:t>
+                      </a:r>
+                    </a:p>
+                  </a:txBody>
+                  <a:tcPr marL="27432" marR="27432" marT="18288" marB="18288"/>
+                </a:tc>
+                <a:tc>
+                  <a:txBody>
+                    <a:bodyPr wrap="none"/>
+                    <a:lstStyle/>
+                    <a:p>
+                      <a:r>
+                        <a:rPr sz="600"/>
+                        <a:t>281.0</a:t>
+                      </a:r>
+                    </a:p>
+                  </a:txBody>
+                  <a:tcPr marL="27432" marR="27432" marT="18288" marB="18288"/>
+                </a:tc>
+                <a:tc>
+                  <a:txBody>
+                    <a:bodyPr wrap="none"/>
+                    <a:lstStyle/>
+                    <a:p>
+                      <a:r>
+                        <a:rPr sz="600"/>
+                        <a:t>562.0</a:t>
+                      </a:r>
+                    </a:p>
+                  </a:txBody>
+                  <a:tcPr marL="27432" marR="27432" marT="18288" marB="18288"/>
+                </a:tc>
+                <a:tc>
+                  <a:txBody>
+                    <a:bodyPr wrap="none"/>
+                    <a:lstStyle/>
+                    <a:p>
+                      <a:r>
+                        <a:rPr sz="600"/>
+                        <a:t>843.0</a:t>
+                      </a:r>
+                    </a:p>
+                  </a:txBody>
+                  <a:tcPr marL="27432" marR="27432" marT="18288" marB="18288"/>
+                </a:tc>
+              </a:tr>
+              <a:tr h="407963">
+                <a:tc>
+                  <a:txBody>
+                    <a:bodyPr wrap="none"/>
+                    <a:lstStyle/>
+                    <a:p>
+                      <a:r>
+                        <a:rPr sz="600"/>
+                        <a:t>/subscriptions/5755893a-8056-4ba8-9916-1133c80a80f3</a:t>
+                      </a:r>
+                    </a:p>
+                  </a:txBody>
+                  <a:tcPr marL="27432" marR="27432" marT="18288" marB="18288"/>
+                </a:tc>
+                <a:tc>
+                  <a:txBody>
+                    <a:bodyPr wrap="none"/>
+                    <a:lstStyle/>
+                    <a:p>
+                      <a:r>
+                        <a:rPr sz="600"/>
+                        <a:t>Unknown resource</a:t>
+                      </a:r>
+                    </a:p>
+                  </a:txBody>
+                  <a:tcPr marL="27432" marR="27432" marT="18288" marB="18288"/>
+                </a:tc>
+                <a:tc>
+                  <a:txBody>
+                    <a:bodyPr wrap="none"/>
+                    <a:lstStyle/>
+                    <a:p>
+                      <a:r>
+                        <a:rPr sz="600"/>
+                        <a:t>e56c672d-9ef6-1bf4-dec1-df13fe733adb</a:t>
+                      </a:r>
+                    </a:p>
+                  </a:txBody>
+                  <a:tcPr marL="27432" marR="27432" marT="18288" marB="18288"/>
+                </a:tc>
+                <a:tc>
+                  <a:txBody>
+                    <a:bodyPr wrap="none"/>
+                    <a:lstStyle/>
+                    <a:p>
+                      <a:r>
+                        <a:rPr sz="600"/>
+                        <a:t>281.0</a:t>
+                      </a:r>
+                    </a:p>
+                  </a:txBody>
+                  <a:tcPr marL="27432" marR="27432" marT="18288" marB="18288"/>
+                </a:tc>
+                <a:tc>
+                  <a:txBody>
+                    <a:bodyPr wrap="none"/>
+                    <a:lstStyle/>
+                    <a:p>
+                      <a:r>
+                        <a:rPr sz="600"/>
+                        <a:t>562.0</a:t>
+                      </a:r>
+                    </a:p>
+                  </a:txBody>
+                  <a:tcPr marL="27432" marR="27432" marT="18288" marB="18288"/>
+                </a:tc>
+                <a:tc>
+                  <a:txBody>
+                    <a:bodyPr wrap="none"/>
+                    <a:lstStyle/>
+                    <a:p>
+                      <a:r>
+                        <a:rPr sz="600"/>
+                        <a:t>843.0</a:t>
+                      </a:r>
+                    </a:p>
+                  </a:txBody>
+                  <a:tcPr marL="27432" marR="27432" marT="18288" marB="18288"/>
+                </a:tc>
+                <a:tc>
+                  <a:txBody>
+                    <a:bodyPr wrap="none"/>
+                    <a:lstStyle/>
+                    <a:p>
+                      <a:r>
+                        <a:rPr sz="600"/>
+                        <a:t>281.0</a:t>
+                      </a:r>
+                    </a:p>
+                  </a:txBody>
+                  <a:tcPr marL="27432" marR="27432" marT="18288" marB="18288"/>
+                </a:tc>
+                <a:tc>
+                  <a:txBody>
+                    <a:bodyPr wrap="none"/>
+                    <a:lstStyle/>
+                    <a:p>
+                      <a:r>
+                        <a:rPr sz="600"/>
+                        <a:t>562.0</a:t>
+                      </a:r>
+                    </a:p>
+                  </a:txBody>
+                  <a:tcPr marL="27432" marR="27432" marT="18288" marB="18288"/>
+                </a:tc>
+                <a:tc>
+                  <a:txBody>
+                    <a:bodyPr wrap="none"/>
+                    <a:lstStyle/>
+                    <a:p>
+                      <a:r>
+                        <a:rPr sz="600"/>
+                        <a:t>843.0</a:t>
+                      </a:r>
+                    </a:p>
+                  </a:txBody>
+                  <a:tcPr marL="27432" marR="27432" marT="18288" marB="18288"/>
+                </a:tc>
+              </a:tr>
+              <a:tr h="407963">
+                <a:tc>
+                  <a:txBody>
+                    <a:bodyPr wrap="none"/>
+                    <a:lstStyle/>
+                    <a:p>
+                      <a:r>
+                        <a:rPr sz="600"/>
+                        <a:t>/subscriptions/5755893a-8056-4ba8-9916-1133c80a80f3/resourcegroups/wolffautomationrg/providers/microsoft.compute/virtualmachines/wolffautohybrworker01</a:t>
+                      </a:r>
+                    </a:p>
+                  </a:txBody>
+                  <a:tcPr marL="27432" marR="27432" marT="18288" marB="18288"/>
+                </a:tc>
+                <a:tc>
+                  <a:txBody>
+                    <a:bodyPr wrap="none"/>
+                    <a:lstStyle/>
+                    <a:p>
+                      <a:r>
+                        <a:rPr sz="600"/>
+                        <a:t>wolffautohybrworker01</a:t>
+                      </a:r>
+                    </a:p>
+                  </a:txBody>
+                  <a:tcPr marL="27432" marR="27432" marT="18288" marB="18288"/>
+                </a:tc>
+                <a:tc>
+                  <a:txBody>
+                    <a:bodyPr wrap="none"/>
+                    <a:lstStyle/>
+                    <a:p>
+                      <a:r>
+                        <a:rPr sz="600"/>
+                        <a:t>20a69d2e-8577-d698-9f2d-a83c852aeab9</a:t>
+                      </a:r>
+                    </a:p>
+                  </a:txBody>
+                  <a:tcPr marL="27432" marR="27432" marT="18288" marB="18288"/>
+                </a:tc>
+                <a:tc>
+                  <a:txBody>
+                    <a:bodyPr wrap="none"/>
+                    <a:lstStyle/>
+                    <a:p>
+                      <a:r>
+                        <a:rPr sz="600"/>
                         <a:t>None</a:t>
                       </a:r>
                     </a:p>
                   </a:txBody>
-                  <a:tcPr/>
-                </a:tc>
-                <a:tc>
-                  <a:txBody>
-                    <a:bodyPr/>
-                    <a:lstStyle/>
-                    <a:p>
-                      <a:r>
+                  <a:tcPr marL="27432" marR="27432" marT="18288" marB="18288"/>
+                </a:tc>
+                <a:tc>
+                  <a:txBody>
+                    <a:bodyPr wrap="none"/>
+                    <a:lstStyle/>
+                    <a:p>
+                      <a:r>
+                        <a:rPr sz="600"/>
                         <a:t>None</a:t>
                       </a:r>
                     </a:p>
                   </a:txBody>
-                  <a:tcPr/>
-                </a:tc>
-                <a:tc>
-                  <a:txBody>
-                    <a:bodyPr/>
-                    <a:lstStyle/>
-                    <a:p>
-                      <a:r>
+                  <a:tcPr marL="27432" marR="27432" marT="18288" marB="18288"/>
+                </a:tc>
+                <a:tc>
+                  <a:txBody>
+                    <a:bodyPr wrap="none"/>
+                    <a:lstStyle/>
+                    <a:p>
+                      <a:r>
+                        <a:rPr sz="600"/>
                         <a:t>None</a:t>
                       </a:r>
                     </a:p>
                   </a:txBody>
-                  <a:tcPr/>
-                </a:tc>
-                <a:tc>
-                  <a:txBody>
-                    <a:bodyPr/>
-                    <a:lstStyle/>
-                    <a:p>
-                      <a:r>
+                  <a:tcPr marL="27432" marR="27432" marT="18288" marB="18288"/>
+                </a:tc>
+                <a:tc>
+                  <a:txBody>
+                    <a:bodyPr wrap="none"/>
+                    <a:lstStyle/>
+                    <a:p>
+                      <a:r>
+                        <a:rPr sz="600"/>
                         <a:t>None</a:t>
                       </a:r>
                     </a:p>
                   </a:txBody>
-                  <a:tcPr/>
-                </a:tc>
-                <a:tc>
-                  <a:txBody>
-                    <a:bodyPr/>
-                    <a:lstStyle/>
-                    <a:p>
-                      <a:r>
+                  <a:tcPr marL="27432" marR="27432" marT="18288" marB="18288"/>
+                </a:tc>
+                <a:tc>
+                  <a:txBody>
+                    <a:bodyPr wrap="none"/>
+                    <a:lstStyle/>
+                    <a:p>
+                      <a:r>
+                        <a:rPr sz="600"/>
                         <a:t>None</a:t>
                       </a:r>
                     </a:p>
                   </a:txBody>
-                  <a:tcPr/>
-                </a:tc>
-                <a:tc>
-                  <a:txBody>
-                    <a:bodyPr/>
-                    <a:lstStyle/>
-                    <a:p>
-                      <a:r>
+                  <a:tcPr marL="27432" marR="27432" marT="18288" marB="18288"/>
+                </a:tc>
+                <a:tc>
+                  <a:txBody>
+                    <a:bodyPr wrap="none"/>
+                    <a:lstStyle/>
+                    <a:p>
+                      <a:r>
+                        <a:rPr sz="600"/>
                         <a:t>None</a:t>
                       </a:r>
                     </a:p>
                   </a:txBody>
-                  <a:tcPr/>
+                  <a:tcPr marL="27432" marR="27432" marT="18288" marB="18288"/>
                 </a:tc>
               </a:tr>
-              <a:tr h="482138">
-                <a:tc>
-                  <a:txBody>
-                    <a:bodyPr/>
-                    <a:lstStyle/>
-                    <a:p>
-                      <a:r>
-                        <a:t>06dc298f-f1f0-3a6a-6891-9c139eaaaf57</a:t>
-                      </a:r>
-                    </a:p>
-                  </a:txBody>
-                  <a:tcPr/>
-                </a:tc>
-                <a:tc>
-                  <a:txBody>
-                    <a:bodyPr/>
-                    <a:lstStyle/>
-                    <a:p>
-                      <a:r>
-                        <a:t>workbookauditacr</a:t>
-                      </a:r>
-                    </a:p>
-                  </a:txBody>
-                  <a:tcPr/>
-                </a:tc>
-                <a:tc>
-                  <a:txBody>
-                    <a:bodyPr/>
-                    <a:lstStyle/>
-                    <a:p>
-                      <a:r>
+              <a:tr h="407963">
+                <a:tc>
+                  <a:txBody>
+                    <a:bodyPr wrap="none"/>
+                    <a:lstStyle/>
+                    <a:p>
+                      <a:r>
+                        <a:rPr sz="600"/>
+                        <a:t>/subscriptions/5755893a-8056-4ba8-9916-1133c80a80f3/resourcegroups/jwgovernance/providers/microsoft.hybridcompute/machines/wolffsurfacepc</a:t>
+                      </a:r>
+                    </a:p>
+                  </a:txBody>
+                  <a:tcPr marL="27432" marR="27432" marT="18288" marB="18288"/>
+                </a:tc>
+                <a:tc>
+                  <a:txBody>
+                    <a:bodyPr wrap="none"/>
+                    <a:lstStyle/>
+                    <a:p>
+                      <a:r>
+                        <a:rPr sz="600"/>
+                        <a:t>wolffsurfacepc</a:t>
+                      </a:r>
+                    </a:p>
+                  </a:txBody>
+                  <a:tcPr marL="27432" marR="27432" marT="18288" marB="18288"/>
+                </a:tc>
+                <a:tc>
+                  <a:txBody>
+                    <a:bodyPr wrap="none"/>
+                    <a:lstStyle/>
+                    <a:p>
+                      <a:r>
+                        <a:rPr sz="600"/>
+                        <a:t>b66800f1-a271-35e5-caed-3ad586b1182d</a:t>
+                      </a:r>
+                    </a:p>
+                  </a:txBody>
+                  <a:tcPr marL="27432" marR="27432" marT="18288" marB="18288"/>
+                </a:tc>
+                <a:tc>
+                  <a:txBody>
+                    <a:bodyPr wrap="none"/>
+                    <a:lstStyle/>
+                    <a:p>
+                      <a:r>
+                        <a:rPr sz="600"/>
                         <a:t>None</a:t>
                       </a:r>
                     </a:p>
                   </a:txBody>
-                  <a:tcPr/>
-                </a:tc>
-                <a:tc>
-                  <a:txBody>
-                    <a:bodyPr/>
-                    <a:lstStyle/>
-                    <a:p>
-                      <a:r>
+                  <a:tcPr marL="27432" marR="27432" marT="18288" marB="18288"/>
+                </a:tc>
+                <a:tc>
+                  <a:txBody>
+                    <a:bodyPr wrap="none"/>
+                    <a:lstStyle/>
+                    <a:p>
+                      <a:r>
+                        <a:rPr sz="600"/>
                         <a:t>None</a:t>
                       </a:r>
                     </a:p>
                   </a:txBody>
-                  <a:tcPr/>
-                </a:tc>
-                <a:tc>
-                  <a:txBody>
-                    <a:bodyPr/>
-                    <a:lstStyle/>
-                    <a:p>
-                      <a:r>
+                  <a:tcPr marL="27432" marR="27432" marT="18288" marB="18288"/>
+                </a:tc>
+                <a:tc>
+                  <a:txBody>
+                    <a:bodyPr wrap="none"/>
+                    <a:lstStyle/>
+                    <a:p>
+                      <a:r>
+                        <a:rPr sz="600"/>
                         <a:t>None</a:t>
                       </a:r>
                     </a:p>
                   </a:txBody>
-                  <a:tcPr/>
-                </a:tc>
-                <a:tc>
-                  <a:txBody>
-                    <a:bodyPr/>
-                    <a:lstStyle/>
-                    <a:p>
-                      <a:r>
+                  <a:tcPr marL="27432" marR="27432" marT="18288" marB="18288"/>
+                </a:tc>
+                <a:tc>
+                  <a:txBody>
+                    <a:bodyPr wrap="none"/>
+                    <a:lstStyle/>
+                    <a:p>
+                      <a:r>
+                        <a:rPr sz="600"/>
                         <a:t>None</a:t>
                       </a:r>
                     </a:p>
                   </a:txBody>
-                  <a:tcPr/>
-                </a:tc>
-                <a:tc>
-                  <a:txBody>
-                    <a:bodyPr/>
-                    <a:lstStyle/>
-                    <a:p>
-                      <a:r>
+                  <a:tcPr marL="27432" marR="27432" marT="18288" marB="18288"/>
+                </a:tc>
+                <a:tc>
+                  <a:txBody>
+                    <a:bodyPr wrap="none"/>
+                    <a:lstStyle/>
+                    <a:p>
+                      <a:r>
+                        <a:rPr sz="600"/>
                         <a:t>None</a:t>
                       </a:r>
                     </a:p>
                   </a:txBody>
-                  <a:tcPr/>
-                </a:tc>
-                <a:tc>
-                  <a:txBody>
-                    <a:bodyPr/>
-                    <a:lstStyle/>
-                    <a:p>
-                      <a:r>
+                  <a:tcPr marL="27432" marR="27432" marT="18288" marB="18288"/>
+                </a:tc>
+                <a:tc>
+                  <a:txBody>
+                    <a:bodyPr wrap="none"/>
+                    <a:lstStyle/>
+                    <a:p>
+                      <a:r>
+                        <a:rPr sz="600"/>
                         <a:t>None</a:t>
                       </a:r>
                     </a:p>
                   </a:txBody>
-                  <a:tcPr/>
+                  <a:tcPr marL="27432" marR="27432" marT="18288" marB="18288"/>
                 </a:tc>
               </a:tr>
-              <a:tr h="482138">
-                <a:tc>
-                  <a:txBody>
-                    <a:bodyPr/>
-                    <a:lstStyle/>
-                    <a:p>
-                      <a:r>
-                        <a:t>6082056b-fc7a-e6ab-eb07-0bb4ff7fd7b8</a:t>
-                      </a:r>
-                    </a:p>
-                  </a:txBody>
-                  <a:tcPr/>
-                </a:tc>
-                <a:tc>
-                  <a:txBody>
-                    <a:bodyPr/>
-                    <a:lstStyle/>
-                    <a:p>
-                      <a:r>
-                        <a:t>ADX-EG-wolffentplogcluster</a:t>
-                      </a:r>
-                    </a:p>
-                  </a:txBody>
-                  <a:tcPr/>
-                </a:tc>
-                <a:tc>
-                  <a:txBody>
-                    <a:bodyPr/>
-                    <a:lstStyle/>
-                    <a:p>
-                      <a:r>
+              <a:tr h="407963">
+                <a:tc>
+                  <a:txBody>
+                    <a:bodyPr wrap="none"/>
+                    <a:lstStyle/>
+                    <a:p>
+                      <a:r>
+                        <a:rPr sz="600"/>
+                        <a:t>/subscriptions/5755893a-8056-4ba8-9916-1133c80a80f3/resourcegroups/wolffautomationrg/providers/microsoft.compute/virtualmachines/wolffautohywkr2-v5</a:t>
+                      </a:r>
+                    </a:p>
+                  </a:txBody>
+                  <a:tcPr marL="27432" marR="27432" marT="18288" marB="18288"/>
+                </a:tc>
+                <a:tc>
+                  <a:txBody>
+                    <a:bodyPr wrap="none"/>
+                    <a:lstStyle/>
+                    <a:p>
+                      <a:r>
+                        <a:rPr sz="600"/>
+                        <a:t>wolffautohywkr2-v5</a:t>
+                      </a:r>
+                    </a:p>
+                  </a:txBody>
+                  <a:tcPr marL="27432" marR="27432" marT="18288" marB="18288"/>
+                </a:tc>
+                <a:tc>
+                  <a:txBody>
+                    <a:bodyPr wrap="none"/>
+                    <a:lstStyle/>
+                    <a:p>
+                      <a:r>
+                        <a:rPr sz="600"/>
+                        <a:t>558da2e1-2b63-9e39-89f3-76c6bd85ddc7</a:t>
+                      </a:r>
+                    </a:p>
+                  </a:txBody>
+                  <a:tcPr marL="27432" marR="27432" marT="18288" marB="18288"/>
+                </a:tc>
+                <a:tc>
+                  <a:txBody>
+                    <a:bodyPr wrap="none"/>
+                    <a:lstStyle/>
+                    <a:p>
+                      <a:r>
+                        <a:rPr sz="600"/>
                         <a:t>None</a:t>
                       </a:r>
                     </a:p>
                   </a:txBody>
-                  <a:tcPr/>
-                </a:tc>
-                <a:tc>
-                  <a:txBody>
-                    <a:bodyPr/>
-                    <a:lstStyle/>
-                    <a:p>
-                      <a:r>
+                  <a:tcPr marL="27432" marR="27432" marT="18288" marB="18288"/>
+                </a:tc>
+                <a:tc>
+                  <a:txBody>
+                    <a:bodyPr wrap="none"/>
+                    <a:lstStyle/>
+                    <a:p>
+                      <a:r>
+                        <a:rPr sz="600"/>
                         <a:t>None</a:t>
                       </a:r>
                     </a:p>
                   </a:txBody>
-                  <a:tcPr/>
-                </a:tc>
-                <a:tc>
-                  <a:txBody>
-                    <a:bodyPr/>
-                    <a:lstStyle/>
-                    <a:p>
-                      <a:r>
+                  <a:tcPr marL="27432" marR="27432" marT="18288" marB="18288"/>
+                </a:tc>
+                <a:tc>
+                  <a:txBody>
+                    <a:bodyPr wrap="none"/>
+                    <a:lstStyle/>
+                    <a:p>
+                      <a:r>
+                        <a:rPr sz="600"/>
                         <a:t>None</a:t>
                       </a:r>
                     </a:p>
                   </a:txBody>
-                  <a:tcPr/>
-                </a:tc>
-                <a:tc>
-                  <a:txBody>
-                    <a:bodyPr/>
-                    <a:lstStyle/>
-                    <a:p>
-                      <a:r>
+                  <a:tcPr marL="27432" marR="27432" marT="18288" marB="18288"/>
+                </a:tc>
+                <a:tc>
+                  <a:txBody>
+                    <a:bodyPr wrap="none"/>
+                    <a:lstStyle/>
+                    <a:p>
+                      <a:r>
+                        <a:rPr sz="600"/>
                         <a:t>None</a:t>
                       </a:r>
                     </a:p>
                   </a:txBody>
-                  <a:tcPr/>
-                </a:tc>
-                <a:tc>
-                  <a:txBody>
-                    <a:bodyPr/>
-                    <a:lstStyle/>
-                    <a:p>
-                      <a:r>
+                  <a:tcPr marL="27432" marR="27432" marT="18288" marB="18288"/>
+                </a:tc>
+                <a:tc>
+                  <a:txBody>
+                    <a:bodyPr wrap="none"/>
+                    <a:lstStyle/>
+                    <a:p>
+                      <a:r>
+                        <a:rPr sz="600"/>
                         <a:t>None</a:t>
                       </a:r>
                     </a:p>
                   </a:txBody>
-                  <a:tcPr/>
-                </a:tc>
-                <a:tc>
-                  <a:txBody>
-                    <a:bodyPr/>
-                    <a:lstStyle/>
-                    <a:p>
-                      <a:r>
+                  <a:tcPr marL="27432" marR="27432" marT="18288" marB="18288"/>
+                </a:tc>
+                <a:tc>
+                  <a:txBody>
+                    <a:bodyPr wrap="none"/>
+                    <a:lstStyle/>
+                    <a:p>
+                      <a:r>
+                        <a:rPr sz="600"/>
                         <a:t>None</a:t>
                       </a:r>
                     </a:p>
                   </a:txBody>
-                  <a:tcPr/>
+                  <a:tcPr marL="27432" marR="27432" marT="18288" marB="18288"/>
                 </a:tc>
               </a:tr>
-              <a:tr h="482138">
-                <a:tc>
-                  <a:txBody>
-                    <a:bodyPr/>
-                    <a:lstStyle/>
-                    <a:p>
-                      <a:r>
-                        <a:t>c4560858-ccff-73b7-e143-2c1f6a58348d</a:t>
-                      </a:r>
-                    </a:p>
-                  </a:txBody>
-                  <a:tcPr/>
-                </a:tc>
-                <a:tc>
-                  <a:txBody>
-                    <a:bodyPr/>
-                    <a:lstStyle/>
-                    <a:p>
-                      <a:r>
-                        <a:t>wolffentpsqlsvr01/master</a:t>
-                      </a:r>
-                    </a:p>
-                  </a:txBody>
-                  <a:tcPr/>
-                </a:tc>
-                <a:tc>
-                  <a:txBody>
-                    <a:bodyPr/>
-                    <a:lstStyle/>
-                    <a:p>
-                      <a:r>
+              <a:tr h="407963">
+                <a:tc>
+                  <a:txBody>
+                    <a:bodyPr wrap="none"/>
+                    <a:lstStyle/>
+                    <a:p>
+                      <a:r>
+                        <a:rPr sz="600"/>
+                        <a:t>/subscriptions/5755893a-8056-4ba8-9916-1133c80a80f3/resourcegroups/jwgovernance/providers/microsoft.hybridcompute/machines/wolfflenovo</a:t>
+                      </a:r>
+                    </a:p>
+                  </a:txBody>
+                  <a:tcPr marL="27432" marR="27432" marT="18288" marB="18288"/>
+                </a:tc>
+                <a:tc>
+                  <a:txBody>
+                    <a:bodyPr wrap="none"/>
+                    <a:lstStyle/>
+                    <a:p>
+                      <a:r>
+                        <a:rPr sz="600"/>
+                        <a:t>wolfflenovo</a:t>
+                      </a:r>
+                    </a:p>
+                  </a:txBody>
+                  <a:tcPr marL="27432" marR="27432" marT="18288" marB="18288"/>
+                </a:tc>
+                <a:tc>
+                  <a:txBody>
+                    <a:bodyPr wrap="none"/>
+                    <a:lstStyle/>
+                    <a:p>
+                      <a:r>
+                        <a:rPr sz="600"/>
+                        <a:t>00408de0-9d6e-676e-ff1a-0faee219cc52</a:t>
+                      </a:r>
+                    </a:p>
+                  </a:txBody>
+                  <a:tcPr marL="27432" marR="27432" marT="18288" marB="18288"/>
+                </a:tc>
+                <a:tc>
+                  <a:txBody>
+                    <a:bodyPr wrap="none"/>
+                    <a:lstStyle/>
+                    <a:p>
+                      <a:r>
+                        <a:rPr sz="600"/>
                         <a:t>None</a:t>
                       </a:r>
                     </a:p>
                   </a:txBody>
-                  <a:tcPr/>
-                </a:tc>
-                <a:tc>
-                  <a:txBody>
-                    <a:bodyPr/>
-                    <a:lstStyle/>
-                    <a:p>
-                      <a:r>
+                  <a:tcPr marL="27432" marR="27432" marT="18288" marB="18288"/>
+                </a:tc>
+                <a:tc>
+                  <a:txBody>
+                    <a:bodyPr wrap="none"/>
+                    <a:lstStyle/>
+                    <a:p>
+                      <a:r>
+                        <a:rPr sz="600"/>
                         <a:t>None</a:t>
                       </a:r>
                     </a:p>
                   </a:txBody>
-                  <a:tcPr/>
-                </a:tc>
-                <a:tc>
-                  <a:txBody>
-                    <a:bodyPr/>
-                    <a:lstStyle/>
-                    <a:p>
-                      <a:r>
+                  <a:tcPr marL="27432" marR="27432" marT="18288" marB="18288"/>
+                </a:tc>
+                <a:tc>
+                  <a:txBody>
+                    <a:bodyPr wrap="none"/>
+                    <a:lstStyle/>
+                    <a:p>
+                      <a:r>
+                        <a:rPr sz="600"/>
                         <a:t>None</a:t>
                       </a:r>
                     </a:p>
                   </a:txBody>
-                  <a:tcPr/>
-                </a:tc>
-                <a:tc>
-                  <a:txBody>
-                    <a:bodyPr/>
-                    <a:lstStyle/>
-                    <a:p>
-                      <a:r>
+                  <a:tcPr marL="27432" marR="27432" marT="18288" marB="18288"/>
+                </a:tc>
+                <a:tc>
+                  <a:txBody>
+                    <a:bodyPr wrap="none"/>
+                    <a:lstStyle/>
+                    <a:p>
+                      <a:r>
+                        <a:rPr sz="600"/>
                         <a:t>None</a:t>
                       </a:r>
                     </a:p>
                   </a:txBody>
-                  <a:tcPr/>
-                </a:tc>
-                <a:tc>
-                  <a:txBody>
-                    <a:bodyPr/>
-                    <a:lstStyle/>
-                    <a:p>
-                      <a:r>
+                  <a:tcPr marL="27432" marR="27432" marT="18288" marB="18288"/>
+                </a:tc>
+                <a:tc>
+                  <a:txBody>
+                    <a:bodyPr wrap="none"/>
+                    <a:lstStyle/>
+                    <a:p>
+                      <a:r>
+                        <a:rPr sz="600"/>
                         <a:t>None</a:t>
                       </a:r>
                     </a:p>
                   </a:txBody>
-                  <a:tcPr/>
-                </a:tc>
-                <a:tc>
-                  <a:txBody>
-                    <a:bodyPr/>
-                    <a:lstStyle/>
-                    <a:p>
-                      <a:r>
+                  <a:tcPr marL="27432" marR="27432" marT="18288" marB="18288"/>
+                </a:tc>
+                <a:tc>
+                  <a:txBody>
+                    <a:bodyPr wrap="none"/>
+                    <a:lstStyle/>
+                    <a:p>
+                      <a:r>
+                        <a:rPr sz="600"/>
                         <a:t>None</a:t>
                       </a:r>
                     </a:p>
                   </a:txBody>
-                  <a:tcPr/>
+                  <a:tcPr marL="27432" marR="27432" marT="18288" marB="18288"/>
                 </a:tc>
               </a:tr>
-              <a:tr h="482138">
-                <a:tc>
-                  <a:txBody>
-                    <a:bodyPr/>
-                    <a:lstStyle/>
-                    <a:p>
-                      <a:r>
-                        <a:t>c9dab0d5-578b-7823-6466-3cb645a3c350</a:t>
-                      </a:r>
-                    </a:p>
-                  </a:txBody>
-                  <a:tcPr/>
-                </a:tc>
-                <a:tc>
-                  <a:txBody>
-                    <a:bodyPr/>
-                    <a:lstStyle/>
-                    <a:p>
-                      <a:r>
-                        <a:t>Unknown resource</a:t>
-                      </a:r>
-                    </a:p>
-                  </a:txBody>
-                  <a:tcPr/>
-                </a:tc>
-                <a:tc>
-                  <a:txBody>
-                    <a:bodyPr/>
-                    <a:lstStyle/>
-                    <a:p>
-                      <a:r>
-                        <a:t>3613.0</a:t>
-                      </a:r>
-                    </a:p>
-                  </a:txBody>
-                  <a:tcPr/>
-                </a:tc>
-                <a:tc>
-                  <a:txBody>
-                    <a:bodyPr/>
-                    <a:lstStyle/>
-                    <a:p>
-                      <a:r>
-                        <a:t>7226.0</a:t>
-                      </a:r>
-                    </a:p>
-                  </a:txBody>
-                  <a:tcPr/>
-                </a:tc>
-                <a:tc>
-                  <a:txBody>
-                    <a:bodyPr/>
-                    <a:lstStyle/>
-                    <a:p>
-                      <a:r>
-                        <a:t>10839.0</a:t>
-                      </a:r>
-                    </a:p>
-                  </a:txBody>
-                  <a:tcPr/>
-                </a:tc>
-                <a:tc>
-                  <a:txBody>
-                    <a:bodyPr/>
-                    <a:lstStyle/>
-                    <a:p>
-                      <a:r>
-                        <a:t>3613.0</a:t>
-                      </a:r>
-                    </a:p>
-                  </a:txBody>
-                  <a:tcPr/>
-                </a:tc>
-                <a:tc>
-                  <a:txBody>
-                    <a:bodyPr/>
-                    <a:lstStyle/>
-                    <a:p>
-                      <a:r>
-                        <a:t>7226.0</a:t>
-                      </a:r>
-                    </a:p>
-                  </a:txBody>
-                  <a:tcPr/>
-                </a:tc>
-                <a:tc>
-                  <a:txBody>
-                    <a:bodyPr/>
-                    <a:lstStyle/>
-                    <a:p>
-                      <a:r>
-                        <a:t>10839.0</a:t>
-                      </a:r>
-                    </a:p>
-                  </a:txBody>
-                  <a:tcPr/>
-                </a:tc>
-              </a:tr>
-              <a:tr h="482138">
-                <a:tc>
-                  <a:txBody>
-                    <a:bodyPr/>
-                    <a:lstStyle/>
-                    <a:p>
-                      <a:r>
-                        <a:t>cf48fc77-a40d-2629-7403-04039ba4cd86</a:t>
-                      </a:r>
-                    </a:p>
-                  </a:txBody>
-                  <a:tcPr/>
-                </a:tc>
-                <a:tc>
-                  <a:txBody>
-                    <a:bodyPr/>
-                    <a:lstStyle/>
-                    <a:p>
-                      <a:r>
-                        <a:t>Unknown resource</a:t>
-                      </a:r>
-                    </a:p>
-                  </a:txBody>
-                  <a:tcPr/>
-                </a:tc>
-                <a:tc>
-                  <a:txBody>
-                    <a:bodyPr/>
-                    <a:lstStyle/>
-                    <a:p>
-                      <a:r>
-                        <a:t>2054.0</a:t>
-                      </a:r>
-                    </a:p>
-                  </a:txBody>
-                  <a:tcPr/>
-                </a:tc>
-                <a:tc>
-                  <a:txBody>
-                    <a:bodyPr/>
-                    <a:lstStyle/>
-                    <a:p>
-                      <a:r>
-                        <a:t>4108.0</a:t>
-                      </a:r>
-                    </a:p>
-                  </a:txBody>
-                  <a:tcPr/>
-                </a:tc>
-                <a:tc>
-                  <a:txBody>
-                    <a:bodyPr/>
-                    <a:lstStyle/>
-                    <a:p>
-                      <a:r>
-                        <a:t>6162.0</a:t>
-                      </a:r>
-                    </a:p>
-                  </a:txBody>
-                  <a:tcPr/>
-                </a:tc>
-                <a:tc>
-                  <a:txBody>
-                    <a:bodyPr/>
-                    <a:lstStyle/>
-                    <a:p>
-                      <a:r>
-                        <a:t>2054.0</a:t>
-                      </a:r>
-                    </a:p>
-                  </a:txBody>
-                  <a:tcPr/>
-                </a:tc>
-                <a:tc>
-                  <a:txBody>
-                    <a:bodyPr/>
-                    <a:lstStyle/>
-                    <a:p>
-                      <a:r>
-                        <a:t>4108.0</a:t>
-                      </a:r>
-                    </a:p>
-                  </a:txBody>
-                  <a:tcPr/>
-                </a:tc>
-                <a:tc>
-                  <a:txBody>
-                    <a:bodyPr/>
-                    <a:lstStyle/>
-                    <a:p>
-                      <a:r>
-                        <a:t>6162.0</a:t>
-                      </a:r>
-                    </a:p>
-                  </a:txBody>
-                  <a:tcPr/>
-                </a:tc>
-              </a:tr>
-              <a:tr h="482138">
-                <a:tc>
-                  <a:txBody>
-                    <a:bodyPr/>
-                    <a:lstStyle/>
-                    <a:p>
-                      <a:r>
-                        <a:t>9e4fecf9-c5bb-aef4-3996-5e35c9205b8d</a:t>
-                      </a:r>
-                    </a:p>
-                  </a:txBody>
-                  <a:tcPr/>
-                </a:tc>
-                <a:tc>
-                  <a:txBody>
-                    <a:bodyPr/>
-                    <a:lstStyle/>
-                    <a:p>
-                      <a:r>
-                        <a:t>wolffavdkeyvault</a:t>
-                      </a:r>
-                    </a:p>
-                  </a:txBody>
-                  <a:tcPr/>
-                </a:tc>
-                <a:tc>
-                  <a:txBody>
-                    <a:bodyPr/>
-                    <a:lstStyle/>
-                    <a:p>
-                      <a:r>
+              <a:tr h="407964">
+                <a:tc>
+                  <a:txBody>
+                    <a:bodyPr wrap="none"/>
+                    <a:lstStyle/>
+                    <a:p>
+                      <a:r>
+                        <a:rPr sz="600"/>
+                        <a:t>/subscriptions/5755893a-8056-4ba8-9916-1133c80a80f3/resourcegroups/wolffentpopenairg/providers/microsoft.documentdb/databaseaccounts/db-wolffentpopenai4</a:t>
+                      </a:r>
+                    </a:p>
+                  </a:txBody>
+                  <a:tcPr marL="27432" marR="27432" marT="18288" marB="18288"/>
+                </a:tc>
+                <a:tc>
+                  <a:txBody>
+                    <a:bodyPr wrap="none"/>
+                    <a:lstStyle/>
+                    <a:p>
+                      <a:r>
+                        <a:rPr sz="600"/>
+                        <a:t>db-wolffentpopenai4</a:t>
+                      </a:r>
+                    </a:p>
+                  </a:txBody>
+                  <a:tcPr marL="27432" marR="27432" marT="18288" marB="18288"/>
+                </a:tc>
+                <a:tc>
+                  <a:txBody>
+                    <a:bodyPr wrap="none"/>
+                    <a:lstStyle/>
+                    <a:p>
+                      <a:r>
+                        <a:rPr sz="600"/>
+                        <a:t>4dee24c1-e6bf-3957-543e-f19a5f1810e7</a:t>
+                      </a:r>
+                    </a:p>
+                  </a:txBody>
+                  <a:tcPr marL="27432" marR="27432" marT="18288" marB="18288"/>
+                </a:tc>
+                <a:tc>
+                  <a:txBody>
+                    <a:bodyPr wrap="none"/>
+                    <a:lstStyle/>
+                    <a:p>
+                      <a:r>
+                        <a:rPr sz="600"/>
                         <a:t>None</a:t>
                       </a:r>
                     </a:p>
                   </a:txBody>
-                  <a:tcPr/>
-                </a:tc>
-                <a:tc>
-                  <a:txBody>
-                    <a:bodyPr/>
-                    <a:lstStyle/>
-                    <a:p>
-                      <a:r>
+                  <a:tcPr marL="27432" marR="27432" marT="18288" marB="18288"/>
+                </a:tc>
+                <a:tc>
+                  <a:txBody>
+                    <a:bodyPr wrap="none"/>
+                    <a:lstStyle/>
+                    <a:p>
+                      <a:r>
+                        <a:rPr sz="600"/>
                         <a:t>None</a:t>
                       </a:r>
                     </a:p>
                   </a:txBody>
-                  <a:tcPr/>
-                </a:tc>
-                <a:tc>
-                  <a:txBody>
-                    <a:bodyPr/>
-                    <a:lstStyle/>
-                    <a:p>
-                      <a:r>
+                  <a:tcPr marL="27432" marR="27432" marT="18288" marB="18288"/>
+                </a:tc>
+                <a:tc>
+                  <a:txBody>
+                    <a:bodyPr wrap="none"/>
+                    <a:lstStyle/>
+                    <a:p>
+                      <a:r>
+                        <a:rPr sz="600"/>
                         <a:t>None</a:t>
                       </a:r>
                     </a:p>
                   </a:txBody>
-                  <a:tcPr/>
-                </a:tc>
-                <a:tc>
-                  <a:txBody>
-                    <a:bodyPr/>
-                    <a:lstStyle/>
-                    <a:p>
-                      <a:r>
+                  <a:tcPr marL="27432" marR="27432" marT="18288" marB="18288"/>
+                </a:tc>
+                <a:tc>
+                  <a:txBody>
+                    <a:bodyPr wrap="none"/>
+                    <a:lstStyle/>
+                    <a:p>
+                      <a:r>
+                        <a:rPr sz="600"/>
                         <a:t>None</a:t>
                       </a:r>
                     </a:p>
                   </a:txBody>
-                  <a:tcPr/>
-                </a:tc>
-                <a:tc>
-                  <a:txBody>
-                    <a:bodyPr/>
-                    <a:lstStyle/>
-                    <a:p>
-                      <a:r>
+                  <a:tcPr marL="27432" marR="27432" marT="18288" marB="18288"/>
+                </a:tc>
+                <a:tc>
+                  <a:txBody>
+                    <a:bodyPr wrap="none"/>
+                    <a:lstStyle/>
+                    <a:p>
+                      <a:r>
+                        <a:rPr sz="600"/>
                         <a:t>None</a:t>
                       </a:r>
                     </a:p>
                   </a:txBody>
-                  <a:tcPr/>
-                </a:tc>
-                <a:tc>
-                  <a:txBody>
-                    <a:bodyPr/>
-                    <a:lstStyle/>
-                    <a:p>
-                      <a:r>
+                  <a:tcPr marL="27432" marR="27432" marT="18288" marB="18288"/>
+                </a:tc>
+                <a:tc>
+                  <a:txBody>
+                    <a:bodyPr wrap="none"/>
+                    <a:lstStyle/>
+                    <a:p>
+                      <a:r>
+                        <a:rPr sz="600"/>
                         <a:t>None</a:t>
                       </a:r>
                     </a:p>
                   </a:txBody>
-                  <a:tcPr/>
-                </a:tc>
-              </a:tr>
-              <a:tr h="482138">
-                <a:tc>
-                  <a:txBody>
-                    <a:bodyPr/>
-                    <a:lstStyle/>
-                    <a:p>
-                      <a:r>
-                        <a:t>f1b66d6d-a84c-1593-612d-378e75c4751f</a:t>
-                      </a:r>
-                    </a:p>
-                  </a:txBody>
-                  <a:tcPr/>
-                </a:tc>
-                <a:tc>
-                  <a:txBody>
-                    <a:bodyPr/>
-                    <a:lstStyle/>
-                    <a:p>
-                      <a:r>
-                        <a:t>wolffmlkv</a:t>
-                      </a:r>
-                    </a:p>
-                  </a:txBody>
-                  <a:tcPr/>
-                </a:tc>
-                <a:tc>
-                  <a:txBody>
-                    <a:bodyPr/>
-                    <a:lstStyle/>
-                    <a:p>
-                      <a:r>
-                        <a:t>None</a:t>
-                      </a:r>
-                    </a:p>
-                  </a:txBody>
-                  <a:tcPr/>
-                </a:tc>
-                <a:tc>
-                  <a:txBody>
-                    <a:bodyPr/>
-                    <a:lstStyle/>
-                    <a:p>
-                      <a:r>
-                        <a:t>None</a:t>
-                      </a:r>
-                    </a:p>
-                  </a:txBody>
-                  <a:tcPr/>
-                </a:tc>
-                <a:tc>
-                  <a:txBody>
-                    <a:bodyPr/>
-                    <a:lstStyle/>
-                    <a:p>
-                      <a:r>
-                        <a:t>None</a:t>
-                      </a:r>
-                    </a:p>
-                  </a:txBody>
-                  <a:tcPr/>
-                </a:tc>
-                <a:tc>
-                  <a:txBody>
-                    <a:bodyPr/>
-                    <a:lstStyle/>
-                    <a:p>
-                      <a:r>
-                        <a:t>None</a:t>
-                      </a:r>
-                    </a:p>
-                  </a:txBody>
-                  <a:tcPr/>
-                </a:tc>
-                <a:tc>
-                  <a:txBody>
-                    <a:bodyPr/>
-                    <a:lstStyle/>
-                    <a:p>
-                      <a:r>
-                        <a:t>None</a:t>
-                      </a:r>
-                    </a:p>
-                  </a:txBody>
-                  <a:tcPr/>
-                </a:tc>
-                <a:tc>
-                  <a:txBody>
-                    <a:bodyPr/>
-                    <a:lstStyle/>
-                    <a:p>
-                      <a:r>
-                        <a:t>None</a:t>
-                      </a:r>
-                    </a:p>
-                  </a:txBody>
-                  <a:tcPr/>
-                </a:tc>
-              </a:tr>
-              <a:tr h="482138">
-                <a:tc>
-                  <a:txBody>
-                    <a:bodyPr/>
-                    <a:lstStyle/>
-                    <a:p>
-                      <a:r>
-                        <a:t>31834388-54e5-0626-376c-51a6d61d9a51</a:t>
-                      </a:r>
-                    </a:p>
-                  </a:txBody>
-                  <a:tcPr/>
-                </a:tc>
-                <a:tc>
-                  <a:txBody>
-                    <a:bodyPr/>
-                    <a:lstStyle/>
-                    <a:p>
-                      <a:r>
-                        <a:t>wolffentpkeyvault</a:t>
-                      </a:r>
-                    </a:p>
-                  </a:txBody>
-                  <a:tcPr/>
-                </a:tc>
-                <a:tc>
-                  <a:txBody>
-                    <a:bodyPr/>
-                    <a:lstStyle/>
-                    <a:p>
-                      <a:r>
-                        <a:t>None</a:t>
-                      </a:r>
-                    </a:p>
-                  </a:txBody>
-                  <a:tcPr/>
-                </a:tc>
-                <a:tc>
-                  <a:txBody>
-                    <a:bodyPr/>
-                    <a:lstStyle/>
-                    <a:p>
-                      <a:r>
-                        <a:t>None</a:t>
-                      </a:r>
-                    </a:p>
-                  </a:txBody>
-                  <a:tcPr/>
-                </a:tc>
-                <a:tc>
-                  <a:txBody>
-                    <a:bodyPr/>
-                    <a:lstStyle/>
-                    <a:p>
-                      <a:r>
-                        <a:t>None</a:t>
-                      </a:r>
-                    </a:p>
-                  </a:txBody>
-                  <a:tcPr/>
-                </a:tc>
-                <a:tc>
-                  <a:txBody>
-                    <a:bodyPr/>
-                    <a:lstStyle/>
-                    <a:p>
-                      <a:r>
-                        <a:t>None</a:t>
-                      </a:r>
-                    </a:p>
-                  </a:txBody>
-                  <a:tcPr/>
-                </a:tc>
-                <a:tc>
-                  <a:txBody>
-                    <a:bodyPr/>
-                    <a:lstStyle/>
-                    <a:p>
-                      <a:r>
-                        <a:t>None</a:t>
-                      </a:r>
-                    </a:p>
-                  </a:txBody>
-                  <a:tcPr/>
-                </a:tc>
-                <a:tc>
-                  <a:txBody>
-                    <a:bodyPr/>
-                    <a:lstStyle/>
-                    <a:p>
-                      <a:r>
-                        <a:t>None</a:t>
-                      </a:r>
-                    </a:p>
-                  </a:txBody>
-                  <a:tcPr/>
-                </a:tc>
-              </a:tr>
-              <a:tr h="482140">
-                <a:tc>
-                  <a:txBody>
-                    <a:bodyPr/>
-                    <a:lstStyle/>
-                    <a:p>
-                      <a:r>
-                        <a:t>698c5013-3186-9d4a-2424-077614f633f2</a:t>
-                      </a:r>
-                    </a:p>
-                  </a:txBody>
-                  <a:tcPr/>
-                </a:tc>
-                <a:tc>
-                  <a:txBody>
-                    <a:bodyPr/>
-                    <a:lstStyle/>
-                    <a:p>
-                      <a:r>
-                        <a:t>kv-suicidepoc-2wj7owxmrb</a:t>
-                      </a:r>
-                    </a:p>
-                  </a:txBody>
-                  <a:tcPr/>
-                </a:tc>
-                <a:tc>
-                  <a:txBody>
-                    <a:bodyPr/>
-                    <a:lstStyle/>
-                    <a:p>
-                      <a:r>
-                        <a:t>None</a:t>
-                      </a:r>
-                    </a:p>
-                  </a:txBody>
-                  <a:tcPr/>
-                </a:tc>
-                <a:tc>
-                  <a:txBody>
-                    <a:bodyPr/>
-                    <a:lstStyle/>
-                    <a:p>
-                      <a:r>
-                        <a:t>None</a:t>
-                      </a:r>
-                    </a:p>
-                  </a:txBody>
-                  <a:tcPr/>
-                </a:tc>
-                <a:tc>
-                  <a:txBody>
-                    <a:bodyPr/>
-                    <a:lstStyle/>
-                    <a:p>
-                      <a:r>
-                        <a:t>None</a:t>
-                      </a:r>
-                    </a:p>
-                  </a:txBody>
-                  <a:tcPr/>
-                </a:tc>
-                <a:tc>
-                  <a:txBody>
-                    <a:bodyPr/>
-                    <a:lstStyle/>
-                    <a:p>
-                      <a:r>
-                        <a:t>None</a:t>
-                      </a:r>
-                    </a:p>
-                  </a:txBody>
-                  <a:tcPr/>
-                </a:tc>
-                <a:tc>
-                  <a:txBody>
-                    <a:bodyPr/>
-                    <a:lstStyle/>
-                    <a:p>
-                      <a:r>
-                        <a:t>None</a:t>
-                      </a:r>
-                    </a:p>
-                  </a:txBody>
-                  <a:tcPr/>
-                </a:tc>
-                <a:tc>
-                  <a:txBody>
-                    <a:bodyPr/>
-                    <a:lstStyle/>
-                    <a:p>
-                      <a:r>
-                        <a:t>None</a:t>
-                      </a:r>
-                    </a:p>
-                  </a:txBody>
-                  <a:tcPr/>
+                  <a:tcPr marL="27432" marR="27432" marT="18288" marB="18288"/>
                 </a:tc>
               </a:tr>
             </a:tbl>
